--- a/KM_Thermal_ColdRegion_Intro_DatasetDeck.pptx
+++ b/KM_Thermal_ColdRegion_Intro_DatasetDeck.pptx
@@ -2731,7 +2731,7 @@
                 <a:ea typeface="Aptos Display" pitchFamily="34" charset="-122"/>
                 <a:cs typeface="Aptos Display" pitchFamily="34" charset="-120"/>
               </a:rPr>
-              <a:t>Dataset: what we know so far</a:t>
+              <a:t>Dataset Description</a:t>
             </a:r>
             <a:endParaRPr lang="en-US" sz="3000" dirty="0"/>
           </a:p>
@@ -2781,8 +2781,8 @@
         </p:nvSpPr>
         <p:spPr>
           <a:xfrm>
-            <a:off x="822960" y="1417320"/>
-            <a:ext cx="2514600" cy="256032"/>
+            <a:off x="502920" y="1645920"/>
+            <a:ext cx="4242816" cy="1517903"/>
           </a:xfrm>
           <a:prstGeom prst="rect">
             <a:avLst/>
@@ -2794,638 +2794,143 @@
           <a:bodyPr wrap="square" lIns="0" tIns="0" rIns="0" bIns="0" rtlCol="0" anchor="ctr"/>
           <a:lstStyle/>
           <a:p>
-            <a:pPr marL="0" indent="0">
-              <a:buNone/>
+            <a:pPr>
+              <a:lnSpc>
+                <a:spcPct val="150000"/>
+              </a:lnSpc>
             </a:pPr>
             <a:r>
-              <a:rPr lang="en-US" sz="1700" b="1" dirty="0">
+              <a:rPr lang="en-US" sz="1400" b="1" dirty="0">
                 <a:solidFill>
                   <a:srgbClr val="FFB84D"/>
                 </a:solidFill>
               </a:rPr>
-              <a:t>Patients / subjects</a:t>
-            </a:r>
-            <a:endParaRPr lang="en-US" sz="1700" dirty="0"/>
-          </a:p>
-        </p:txBody>
-      </p:sp>
-      <p:sp>
-        <p:nvSpPr>
-          <p:cNvPr id="7" name="Text 5"/>
-          <p:cNvSpPr/>
-          <p:nvPr/>
-        </p:nvSpPr>
-        <p:spPr>
-          <a:xfrm>
-            <a:off x="3429000" y="1417320"/>
-            <a:ext cx="7863840" cy="256032"/>
-          </a:xfrm>
-          <a:prstGeom prst="rect">
-            <a:avLst/>
-          </a:prstGeom>
-          <a:noFill/>
-          <a:ln/>
-        </p:spPr>
-        <p:txBody>
-          <a:bodyPr wrap="square" lIns="0" tIns="0" rIns="0" bIns="0" rtlCol="0" anchor="ctr">
-            <a:normAutofit lnSpcReduction="10000"/>
-          </a:bodyPr>
-          <a:lstStyle/>
-          <a:p>
-            <a:pPr marL="0" indent="0">
-              <a:buNone/>
+              <a:t>Patients / subjects : </a:t>
+            </a:r>
+            <a:r>
+              <a:rPr lang="en-US" sz="1400" dirty="0">
+                <a:solidFill>
+                  <a:srgbClr val="F4F8FA"/>
+                </a:solidFill>
+              </a:rPr>
+              <a:t>7 subjects</a:t>
+            </a:r>
+            <a:endParaRPr lang="en-US" sz="1400" b="1" dirty="0">
+              <a:solidFill>
+                <a:srgbClr val="FFB84D"/>
+              </a:solidFill>
+            </a:endParaRPr>
+          </a:p>
+          <a:p>
+            <a:pPr>
+              <a:lnSpc>
+                <a:spcPct val="150000"/>
+              </a:lnSpc>
             </a:pPr>
             <a:r>
-              <a:rPr lang="en-US" sz="1700" dirty="0">
+              <a:rPr lang="en-US" sz="1400" b="1" dirty="0">
+                <a:solidFill>
+                  <a:srgbClr val="FFB84D"/>
+                </a:solidFill>
+              </a:rPr>
+              <a:t>Doctors: </a:t>
+            </a:r>
+            <a:r>
+              <a:rPr lang="en-US" sz="1400" dirty="0">
                 <a:solidFill>
                   <a:srgbClr val="F4F8FA"/>
                 </a:solidFill>
               </a:rPr>
-              <a:t>Reported: 7 subjects</a:t>
-            </a:r>
-            <a:endParaRPr lang="en-US" sz="1700" dirty="0"/>
-          </a:p>
-        </p:txBody>
-      </p:sp>
-      <p:sp>
-        <p:nvSpPr>
-          <p:cNvPr id="8" name="Shape 6"/>
-          <p:cNvSpPr/>
-          <p:nvPr/>
-        </p:nvSpPr>
-        <p:spPr>
-          <a:xfrm>
-            <a:off x="822960" y="1828800"/>
-            <a:ext cx="10515600" cy="0"/>
-          </a:xfrm>
-          <a:prstGeom prst="line">
-            <a:avLst/>
-          </a:prstGeom>
-          <a:noFill/>
-          <a:ln w="12700">
-            <a:solidFill>
-              <a:srgbClr val="334754"/>
-            </a:solidFill>
-            <a:prstDash val="solid"/>
-          </a:ln>
-        </p:spPr>
-      </p:sp>
-      <p:sp>
-        <p:nvSpPr>
-          <p:cNvPr id="9" name="Text 7"/>
-          <p:cNvSpPr/>
-          <p:nvPr/>
-        </p:nvSpPr>
-        <p:spPr>
-          <a:xfrm>
-            <a:off x="822960" y="2130552"/>
-            <a:ext cx="2514600" cy="256032"/>
-          </a:xfrm>
-          <a:prstGeom prst="rect">
-            <a:avLst/>
-          </a:prstGeom>
-          <a:noFill/>
-          <a:ln/>
-        </p:spPr>
-        <p:txBody>
-          <a:bodyPr wrap="square" lIns="0" tIns="0" rIns="0" bIns="0" rtlCol="0" anchor="ctr"/>
-          <a:lstStyle/>
-          <a:p>
-            <a:pPr marL="0" indent="0">
-              <a:buNone/>
+              <a:t>4 KM doctors</a:t>
+            </a:r>
+            <a:endParaRPr lang="en-US" sz="1400" b="1" dirty="0">
+              <a:solidFill>
+                <a:srgbClr val="FFB84D"/>
+              </a:solidFill>
+            </a:endParaRPr>
+          </a:p>
+          <a:p>
+            <a:pPr>
+              <a:lnSpc>
+                <a:spcPct val="150000"/>
+              </a:lnSpc>
             </a:pPr>
             <a:r>
-              <a:rPr lang="en-US" sz="1700" b="1" dirty="0">
+              <a:rPr lang="en-US" sz="1400" b="1" dirty="0">
                 <a:solidFill>
                   <a:srgbClr val="FFB84D"/>
                 </a:solidFill>
               </a:rPr>
-              <a:t>Doctors</a:t>
-            </a:r>
-            <a:endParaRPr lang="en-US" sz="1700" dirty="0"/>
-          </a:p>
-        </p:txBody>
-      </p:sp>
-      <p:sp>
-        <p:nvSpPr>
-          <p:cNvPr id="10" name="Text 8"/>
-          <p:cNvSpPr/>
-          <p:nvPr/>
-        </p:nvSpPr>
-        <p:spPr>
-          <a:xfrm>
-            <a:off x="3429000" y="2130552"/>
-            <a:ext cx="7863840" cy="256032"/>
-          </a:xfrm>
-          <a:prstGeom prst="rect">
-            <a:avLst/>
-          </a:prstGeom>
-          <a:noFill/>
-          <a:ln/>
-        </p:spPr>
-        <p:txBody>
-          <a:bodyPr wrap="square" lIns="0" tIns="0" rIns="0" bIns="0" rtlCol="0" anchor="ctr">
-            <a:normAutofit lnSpcReduction="10000"/>
-          </a:bodyPr>
-          <a:lstStyle/>
-          <a:p>
-            <a:pPr marL="0" indent="0">
-              <a:buNone/>
+              <a:t>Annotation repeats: </a:t>
+            </a:r>
+            <a:r>
+              <a:rPr lang="en-US" sz="1400" dirty="0">
+                <a:solidFill>
+                  <a:srgbClr val="F4F8FA"/>
+                </a:solidFill>
+              </a:rPr>
+              <a:t>: 3 tries per doctor</a:t>
+            </a:r>
+            <a:endParaRPr lang="en-US" sz="1400" b="1" dirty="0">
+              <a:solidFill>
+                <a:srgbClr val="FFB84D"/>
+              </a:solidFill>
+            </a:endParaRPr>
+          </a:p>
+          <a:p>
+            <a:pPr>
+              <a:lnSpc>
+                <a:spcPct val="150000"/>
+              </a:lnSpc>
             </a:pPr>
             <a:r>
-              <a:rPr lang="en-US" sz="1700" dirty="0">
+              <a:rPr lang="en-US" sz="1400" b="1" dirty="0">
+                <a:solidFill>
+                  <a:srgbClr val="FFB84D"/>
+                </a:solidFill>
+              </a:rPr>
+              <a:t>Image type: </a:t>
+            </a:r>
+            <a:r>
+              <a:rPr lang="en-US" sz="1400" dirty="0">
                 <a:solidFill>
                   <a:srgbClr val="F4F8FA"/>
                 </a:solidFill>
               </a:rPr>
-              <a:t>Reported: 4 KM doctors</a:t>
-            </a:r>
-            <a:endParaRPr lang="en-US" sz="1700" dirty="0"/>
-          </a:p>
-        </p:txBody>
-      </p:sp>
-      <p:sp>
-        <p:nvSpPr>
-          <p:cNvPr id="11" name="Shape 9"/>
-          <p:cNvSpPr/>
-          <p:nvPr/>
-        </p:nvSpPr>
-        <p:spPr>
-          <a:xfrm>
-            <a:off x="822960" y="2542032"/>
-            <a:ext cx="10515600" cy="0"/>
-          </a:xfrm>
-          <a:prstGeom prst="line">
-            <a:avLst/>
-          </a:prstGeom>
-          <a:noFill/>
-          <a:ln w="12700">
-            <a:solidFill>
-              <a:srgbClr val="334754"/>
-            </a:solidFill>
-            <a:prstDash val="solid"/>
-          </a:ln>
-        </p:spPr>
-      </p:sp>
-      <p:sp>
-        <p:nvSpPr>
-          <p:cNvPr id="12" name="Text 10"/>
-          <p:cNvSpPr/>
-          <p:nvPr/>
-        </p:nvSpPr>
-        <p:spPr>
-          <a:xfrm>
-            <a:off x="822960" y="2843784"/>
-            <a:ext cx="2514600" cy="256032"/>
-          </a:xfrm>
-          <a:prstGeom prst="rect">
-            <a:avLst/>
-          </a:prstGeom>
-          <a:noFill/>
-          <a:ln/>
-        </p:spPr>
-        <p:txBody>
-          <a:bodyPr wrap="square" lIns="0" tIns="0" rIns="0" bIns="0" rtlCol="0" anchor="ctr"/>
-          <a:lstStyle/>
-          <a:p>
-            <a:pPr marL="0" indent="0">
-              <a:buNone/>
+              <a:t>FIR thermal abdomen image, grayscale</a:t>
+            </a:r>
+            <a:r>
+              <a:rPr lang="en-US" sz="1400" b="1" dirty="0">
+                <a:solidFill>
+                  <a:srgbClr val="FFB84D"/>
+                </a:solidFill>
+              </a:rPr>
+              <a:t> </a:t>
+            </a:r>
+          </a:p>
+          <a:p>
+            <a:pPr>
+              <a:lnSpc>
+                <a:spcPct val="150000"/>
+              </a:lnSpc>
             </a:pPr>
             <a:r>
-              <a:rPr lang="en-US" sz="1700" b="1" dirty="0">
+              <a:rPr lang="en-US" sz="1400" b="1" dirty="0">
                 <a:solidFill>
                   <a:srgbClr val="FFB84D"/>
                 </a:solidFill>
               </a:rPr>
-              <a:t>Annotation repeats</a:t>
-            </a:r>
-            <a:endParaRPr lang="en-US" sz="1700" dirty="0"/>
-          </a:p>
-        </p:txBody>
-      </p:sp>
-      <p:sp>
-        <p:nvSpPr>
-          <p:cNvPr id="13" name="Text 11"/>
-          <p:cNvSpPr/>
-          <p:nvPr/>
-        </p:nvSpPr>
-        <p:spPr>
-          <a:xfrm>
-            <a:off x="3429000" y="2843784"/>
-            <a:ext cx="7863840" cy="256032"/>
-          </a:xfrm>
-          <a:prstGeom prst="rect">
-            <a:avLst/>
-          </a:prstGeom>
-          <a:noFill/>
-          <a:ln/>
-        </p:spPr>
-        <p:txBody>
-          <a:bodyPr wrap="square" lIns="0" tIns="0" rIns="0" bIns="0" rtlCol="0" anchor="ctr">
-            <a:normAutofit lnSpcReduction="10000"/>
-          </a:bodyPr>
-          <a:lstStyle/>
-          <a:p>
-            <a:pPr marL="0" indent="0">
-              <a:buNone/>
-            </a:pPr>
-            <a:r>
-              <a:rPr lang="en-US" sz="1700" dirty="0">
+              <a:t>Target label: </a:t>
+            </a:r>
+            <a:r>
+              <a:rPr lang="en-US" sz="1400" dirty="0">
                 <a:solidFill>
                   <a:srgbClr val="F4F8FA"/>
                 </a:solidFill>
               </a:rPr>
-              <a:t>Reported: 3 tries per doctor</a:t>
-            </a:r>
-            <a:endParaRPr lang="en-US" sz="1700" dirty="0"/>
-          </a:p>
-        </p:txBody>
-      </p:sp>
-      <p:sp>
-        <p:nvSpPr>
-          <p:cNvPr id="14" name="Shape 12"/>
-          <p:cNvSpPr/>
-          <p:nvPr/>
-        </p:nvSpPr>
-        <p:spPr>
-          <a:xfrm>
-            <a:off x="822960" y="3255264"/>
-            <a:ext cx="10515600" cy="0"/>
-          </a:xfrm>
-          <a:prstGeom prst="line">
-            <a:avLst/>
-          </a:prstGeom>
-          <a:noFill/>
-          <a:ln w="12700">
-            <a:solidFill>
-              <a:srgbClr val="334754"/>
-            </a:solidFill>
-            <a:prstDash val="solid"/>
-          </a:ln>
-        </p:spPr>
-      </p:sp>
-      <p:sp>
-        <p:nvSpPr>
-          <p:cNvPr id="15" name="Text 13"/>
-          <p:cNvSpPr/>
-          <p:nvPr/>
-        </p:nvSpPr>
-        <p:spPr>
-          <a:xfrm>
-            <a:off x="822960" y="3557016"/>
-            <a:ext cx="2514600" cy="256032"/>
-          </a:xfrm>
-          <a:prstGeom prst="rect">
-            <a:avLst/>
-          </a:prstGeom>
-          <a:noFill/>
-          <a:ln/>
-        </p:spPr>
-        <p:txBody>
-          <a:bodyPr wrap="square" lIns="0" tIns="0" rIns="0" bIns="0" rtlCol="0" anchor="ctr"/>
-          <a:lstStyle/>
-          <a:p>
-            <a:pPr marL="0" indent="0">
-              <a:buNone/>
-            </a:pPr>
-            <a:r>
-              <a:rPr lang="en-US" sz="1700" b="1" dirty="0">
-                <a:solidFill>
-                  <a:srgbClr val="FFB84D"/>
-                </a:solidFill>
-              </a:rPr>
-              <a:t>Images / masks</a:t>
-            </a:r>
-            <a:endParaRPr lang="en-US" sz="1700" dirty="0"/>
-          </a:p>
-        </p:txBody>
-      </p:sp>
-      <p:sp>
-        <p:nvSpPr>
-          <p:cNvPr id="16" name="Text 14"/>
-          <p:cNvSpPr/>
-          <p:nvPr/>
-        </p:nvSpPr>
-        <p:spPr>
-          <a:xfrm>
-            <a:off x="3429000" y="3557016"/>
-            <a:ext cx="7863840" cy="256032"/>
-          </a:xfrm>
-          <a:prstGeom prst="rect">
-            <a:avLst/>
-          </a:prstGeom>
-          <a:noFill/>
-          <a:ln/>
-        </p:spPr>
-        <p:txBody>
-          <a:bodyPr wrap="square" lIns="0" tIns="0" rIns="0" bIns="0" rtlCol="0" anchor="ctr">
-            <a:normAutofit lnSpcReduction="10000"/>
-          </a:bodyPr>
-          <a:lstStyle/>
-          <a:p>
-            <a:pPr marL="0" indent="0">
-              <a:buNone/>
-            </a:pPr>
-            <a:r>
-              <a:rPr lang="en-US" sz="1700" dirty="0">
-                <a:solidFill>
-                  <a:srgbClr val="F4F8FA"/>
-                </a:solidFill>
-              </a:rPr>
-              <a:t>Likely 12 annotations per patient/image — must verify</a:t>
-            </a:r>
-            <a:endParaRPr lang="en-US" sz="1700" dirty="0"/>
-          </a:p>
-        </p:txBody>
-      </p:sp>
-      <p:sp>
-        <p:nvSpPr>
-          <p:cNvPr id="17" name="Shape 15"/>
-          <p:cNvSpPr/>
-          <p:nvPr/>
-        </p:nvSpPr>
-        <p:spPr>
-          <a:xfrm>
-            <a:off x="822960" y="3968496"/>
-            <a:ext cx="10515600" cy="0"/>
-          </a:xfrm>
-          <a:prstGeom prst="line">
-            <a:avLst/>
-          </a:prstGeom>
-          <a:noFill/>
-          <a:ln w="12700">
-            <a:solidFill>
-              <a:srgbClr val="334754"/>
-            </a:solidFill>
-            <a:prstDash val="solid"/>
-          </a:ln>
-        </p:spPr>
-      </p:sp>
-      <p:sp>
-        <p:nvSpPr>
-          <p:cNvPr id="18" name="Text 16"/>
-          <p:cNvSpPr/>
-          <p:nvPr/>
-        </p:nvSpPr>
-        <p:spPr>
-          <a:xfrm>
-            <a:off x="822960" y="4270248"/>
-            <a:ext cx="2514600" cy="256032"/>
-          </a:xfrm>
-          <a:prstGeom prst="rect">
-            <a:avLst/>
-          </a:prstGeom>
-          <a:noFill/>
-          <a:ln/>
-        </p:spPr>
-        <p:txBody>
-          <a:bodyPr wrap="square" lIns="0" tIns="0" rIns="0" bIns="0" rtlCol="0" anchor="ctr"/>
-          <a:lstStyle/>
-          <a:p>
-            <a:pPr marL="0" indent="0">
-              <a:buNone/>
-            </a:pPr>
-            <a:r>
-              <a:rPr lang="en-US" sz="1700" b="1" dirty="0">
-                <a:solidFill>
-                  <a:srgbClr val="FFB84D"/>
-                </a:solidFill>
-              </a:rPr>
-              <a:t>Image type</a:t>
-            </a:r>
-            <a:endParaRPr lang="en-US" sz="1700" dirty="0"/>
-          </a:p>
-        </p:txBody>
-      </p:sp>
-      <p:sp>
-        <p:nvSpPr>
-          <p:cNvPr id="19" name="Text 17"/>
-          <p:cNvSpPr/>
-          <p:nvPr/>
-        </p:nvSpPr>
-        <p:spPr>
-          <a:xfrm>
-            <a:off x="3429000" y="4270248"/>
-            <a:ext cx="7863840" cy="256032"/>
-          </a:xfrm>
-          <a:prstGeom prst="rect">
-            <a:avLst/>
-          </a:prstGeom>
-          <a:noFill/>
-          <a:ln/>
-        </p:spPr>
-        <p:txBody>
-          <a:bodyPr wrap="square" lIns="0" tIns="0" rIns="0" bIns="0" rtlCol="0" anchor="ctr">
-            <a:normAutofit lnSpcReduction="10000"/>
-          </a:bodyPr>
-          <a:lstStyle/>
-          <a:p>
-            <a:pPr marL="0" indent="0">
-              <a:buNone/>
-            </a:pPr>
-            <a:r>
-              <a:rPr lang="en-US" sz="1700" dirty="0">
-                <a:solidFill>
-                  <a:srgbClr val="F4F8FA"/>
-                </a:solidFill>
-              </a:rPr>
-              <a:t>FIR thermal abdomen image, grayscale</a:t>
-            </a:r>
-            <a:endParaRPr lang="en-US" sz="1700" dirty="0"/>
-          </a:p>
-        </p:txBody>
-      </p:sp>
-      <p:sp>
-        <p:nvSpPr>
-          <p:cNvPr id="20" name="Shape 18"/>
-          <p:cNvSpPr/>
-          <p:nvPr/>
-        </p:nvSpPr>
-        <p:spPr>
-          <a:xfrm>
-            <a:off x="822960" y="4681728"/>
-            <a:ext cx="10515600" cy="0"/>
-          </a:xfrm>
-          <a:prstGeom prst="line">
-            <a:avLst/>
-          </a:prstGeom>
-          <a:noFill/>
-          <a:ln w="12700">
-            <a:solidFill>
-              <a:srgbClr val="334754"/>
-            </a:solidFill>
-            <a:prstDash val="solid"/>
-          </a:ln>
-        </p:spPr>
-      </p:sp>
-      <p:sp>
-        <p:nvSpPr>
-          <p:cNvPr id="21" name="Text 19"/>
-          <p:cNvSpPr/>
-          <p:nvPr/>
-        </p:nvSpPr>
-        <p:spPr>
-          <a:xfrm>
-            <a:off x="822960" y="4983480"/>
-            <a:ext cx="2514600" cy="256032"/>
-          </a:xfrm>
-          <a:prstGeom prst="rect">
-            <a:avLst/>
-          </a:prstGeom>
-          <a:noFill/>
-          <a:ln/>
-        </p:spPr>
-        <p:txBody>
-          <a:bodyPr wrap="square" lIns="0" tIns="0" rIns="0" bIns="0" rtlCol="0" anchor="ctr"/>
-          <a:lstStyle/>
-          <a:p>
-            <a:pPr marL="0" indent="0">
-              <a:buNone/>
-            </a:pPr>
-            <a:r>
-              <a:rPr lang="en-US" sz="1700" b="1" dirty="0">
-                <a:solidFill>
-                  <a:srgbClr val="FFB84D"/>
-                </a:solidFill>
-              </a:rPr>
-              <a:t>Target label</a:t>
-            </a:r>
-            <a:endParaRPr lang="en-US" sz="1700" dirty="0"/>
-          </a:p>
-        </p:txBody>
-      </p:sp>
-      <p:sp>
-        <p:nvSpPr>
-          <p:cNvPr id="22" name="Text 20"/>
-          <p:cNvSpPr/>
-          <p:nvPr/>
-        </p:nvSpPr>
-        <p:spPr>
-          <a:xfrm>
-            <a:off x="3429000" y="4983480"/>
-            <a:ext cx="7863840" cy="256032"/>
-          </a:xfrm>
-          <a:prstGeom prst="rect">
-            <a:avLst/>
-          </a:prstGeom>
-          <a:noFill/>
-          <a:ln/>
-        </p:spPr>
-        <p:txBody>
-          <a:bodyPr wrap="square" lIns="0" tIns="0" rIns="0" bIns="0" rtlCol="0" anchor="ctr">
-            <a:normAutofit lnSpcReduction="10000"/>
-          </a:bodyPr>
-          <a:lstStyle/>
-          <a:p>
-            <a:pPr marL="0" indent="0">
-              <a:buNone/>
-            </a:pPr>
-            <a:r>
-              <a:rPr lang="en-US" sz="1700" dirty="0">
-                <a:solidFill>
-                  <a:srgbClr val="F4F8FA"/>
-                </a:solidFill>
-              </a:rPr>
               <a:t>Doctor-marked cold-region mask</a:t>
             </a:r>
-            <a:endParaRPr lang="en-US" sz="1700" dirty="0"/>
-          </a:p>
-        </p:txBody>
-      </p:sp>
-      <p:sp>
-        <p:nvSpPr>
-          <p:cNvPr id="23" name="Shape 21"/>
-          <p:cNvSpPr/>
-          <p:nvPr/>
-        </p:nvSpPr>
-        <p:spPr>
-          <a:xfrm>
-            <a:off x="822960" y="5394960"/>
-            <a:ext cx="10515600" cy="0"/>
-          </a:xfrm>
-          <a:prstGeom prst="line">
-            <a:avLst/>
-          </a:prstGeom>
-          <a:noFill/>
-          <a:ln w="12700">
-            <a:solidFill>
-              <a:srgbClr val="334754"/>
-            </a:solidFill>
-            <a:prstDash val="solid"/>
-          </a:ln>
-        </p:spPr>
-      </p:sp>
-      <p:sp>
-        <p:nvSpPr>
-          <p:cNvPr id="24" name="Text 22"/>
-          <p:cNvSpPr/>
-          <p:nvPr/>
-        </p:nvSpPr>
-        <p:spPr>
-          <a:xfrm>
-            <a:off x="822960" y="5870448"/>
-            <a:ext cx="914400" cy="201168"/>
-          </a:xfrm>
-          <a:prstGeom prst="rect">
-            <a:avLst/>
-          </a:prstGeom>
-          <a:noFill/>
-          <a:ln/>
-        </p:spPr>
-        <p:txBody>
-          <a:bodyPr wrap="square" lIns="0" tIns="0" rIns="0" bIns="0" rtlCol="0" anchor="ctr"/>
-          <a:lstStyle/>
-          <a:p>
-            <a:pPr marL="0" indent="0">
-              <a:buNone/>
-            </a:pPr>
-            <a:r>
-              <a:rPr lang="en-US" sz="1300" b="1" dirty="0">
-                <a:solidFill>
-                  <a:srgbClr val="FF5E5B"/>
-                </a:solidFill>
-              </a:rPr>
-              <a:t>Current risk</a:t>
-            </a:r>
-            <a:endParaRPr lang="en-US" sz="1300" dirty="0"/>
-          </a:p>
-        </p:txBody>
-      </p:sp>
-      <p:sp>
-        <p:nvSpPr>
-          <p:cNvPr id="25" name="Text 23"/>
-          <p:cNvSpPr/>
-          <p:nvPr/>
-        </p:nvSpPr>
-        <p:spPr>
-          <a:xfrm>
-            <a:off x="2148840" y="5870448"/>
-            <a:ext cx="8961120" cy="201168"/>
-          </a:xfrm>
-          <a:prstGeom prst="rect">
-            <a:avLst/>
-          </a:prstGeom>
-          <a:noFill/>
-          <a:ln/>
-        </p:spPr>
-        <p:txBody>
-          <a:bodyPr wrap="square" lIns="0" tIns="0" rIns="0" bIns="0" rtlCol="0" anchor="ctr">
-            <a:normAutofit/>
-          </a:bodyPr>
-          <a:lstStyle/>
-          <a:p>
-            <a:pPr marL="0" indent="0">
-              <a:buNone/>
-            </a:pPr>
-            <a:r>
-              <a:rPr lang="en-US" sz="1320" dirty="0">
-                <a:solidFill>
-                  <a:srgbClr val="B8C7D0"/>
-                </a:solidFill>
-              </a:rPr>
-              <a:t>If the same image has 12 masks, treating them as 12 independent hard-label samples can create contradictory supervision.</a:t>
-            </a:r>
-            <a:endParaRPr lang="en-US" sz="1320" dirty="0"/>
+            <a:endParaRPr lang="en-US" sz="1400" dirty="0"/>
           </a:p>
         </p:txBody>
       </p:sp>
@@ -3674,6 +3179,995 @@
           </p:txBody>
         </p:sp>
       </p:grpSp>
+      <p:graphicFrame>
+        <p:nvGraphicFramePr>
+          <p:cNvPr id="2" name="Table 1">
+            <a:extLst>
+              <a:ext uri="{FF2B5EF4-FFF2-40B4-BE49-F238E27FC236}">
+                <a16:creationId xmlns:a16="http://schemas.microsoft.com/office/drawing/2014/main" id="{437980E3-9849-CF71-7314-FF6F9D3C25C9}"/>
+              </a:ext>
+            </a:extLst>
+          </p:cNvPr>
+          <p:cNvGraphicFramePr>
+            <a:graphicFrameLocks noGrp="1"/>
+          </p:cNvGraphicFramePr>
+          <p:nvPr>
+            <p:extLst>
+              <p:ext uri="{D42A27DB-BD31-4B8C-83A1-F6EECF244321}">
+                <p14:modId xmlns:p14="http://schemas.microsoft.com/office/powerpoint/2010/main" val="3533556558"/>
+              </p:ext>
+            </p:extLst>
+          </p:nvPr>
+        </p:nvGraphicFramePr>
+        <p:xfrm>
+          <a:off x="6844294" y="1453896"/>
+          <a:ext cx="4585706" cy="2371648"/>
+        </p:xfrm>
+        <a:graphic>
+          <a:graphicData uri="http://schemas.openxmlformats.org/drawingml/2006/table">
+            <a:tbl>
+              <a:tblPr firstRow="1" bandRow="1">
+                <a:tableStyleId>{BDBED569-4797-4DF1-A0F4-6AAB3CD982D8}</a:tableStyleId>
+              </a:tblPr>
+              <a:tblGrid>
+                <a:gridCol w="736082">
+                  <a:extLst>
+                    <a:ext uri="{9D8B030D-6E8A-4147-A177-3AD203B41FA5}">
+                      <a16:colId xmlns:a16="http://schemas.microsoft.com/office/drawing/2014/main" val="3751549051"/>
+                    </a:ext>
+                  </a:extLst>
+                </a:gridCol>
+                <a:gridCol w="1069848">
+                  <a:extLst>
+                    <a:ext uri="{9D8B030D-6E8A-4147-A177-3AD203B41FA5}">
+                      <a16:colId xmlns:a16="http://schemas.microsoft.com/office/drawing/2014/main" val="3919310526"/>
+                    </a:ext>
+                  </a:extLst>
+                </a:gridCol>
+                <a:gridCol w="1042416">
+                  <a:extLst>
+                    <a:ext uri="{9D8B030D-6E8A-4147-A177-3AD203B41FA5}">
+                      <a16:colId xmlns:a16="http://schemas.microsoft.com/office/drawing/2014/main" val="2427857085"/>
+                    </a:ext>
+                  </a:extLst>
+                </a:gridCol>
+                <a:gridCol w="1737360">
+                  <a:extLst>
+                    <a:ext uri="{9D8B030D-6E8A-4147-A177-3AD203B41FA5}">
+                      <a16:colId xmlns:a16="http://schemas.microsoft.com/office/drawing/2014/main" val="2619091723"/>
+                    </a:ext>
+                  </a:extLst>
+                </a:gridCol>
+              </a:tblGrid>
+              <a:tr h="296456">
+                <a:tc>
+                  <a:txBody>
+                    <a:bodyPr/>
+                    <a:lstStyle/>
+                    <a:p>
+                      <a:r>
+                        <a:rPr lang="en-US" sz="1000" dirty="0">
+                          <a:solidFill>
+                            <a:schemeClr val="bg1"/>
+                          </a:solidFill>
+                        </a:rPr>
+                        <a:t>Subject</a:t>
+                      </a:r>
+                    </a:p>
+                  </a:txBody>
+                  <a:tcPr>
+                    <a:solidFill>
+                      <a:schemeClr val="tx1"/>
+                    </a:solidFill>
+                  </a:tcPr>
+                </a:tc>
+                <a:tc>
+                  <a:txBody>
+                    <a:bodyPr/>
+                    <a:lstStyle/>
+                    <a:p>
+                      <a:r>
+                        <a:rPr lang="en-US" sz="1000" dirty="0">
+                          <a:solidFill>
+                            <a:schemeClr val="bg1"/>
+                          </a:solidFill>
+                        </a:rPr>
+                        <a:t>Avg body pixels</a:t>
+                      </a:r>
+                    </a:p>
+                  </a:txBody>
+                  <a:tcPr>
+                    <a:solidFill>
+                      <a:schemeClr val="tx1"/>
+                    </a:solidFill>
+                  </a:tcPr>
+                </a:tc>
+                <a:tc>
+                  <a:txBody>
+                    <a:bodyPr/>
+                    <a:lstStyle/>
+                    <a:p>
+                      <a:r>
+                        <a:rPr lang="en-US" sz="1000" dirty="0">
+                          <a:solidFill>
+                            <a:schemeClr val="bg1"/>
+                          </a:solidFill>
+                        </a:rPr>
+                        <a:t>Avg cold pixels</a:t>
+                      </a:r>
+                    </a:p>
+                  </a:txBody>
+                  <a:tcPr>
+                    <a:solidFill>
+                      <a:schemeClr val="tx1"/>
+                    </a:solidFill>
+                  </a:tcPr>
+                </a:tc>
+                <a:tc>
+                  <a:txBody>
+                    <a:bodyPr/>
+                    <a:lstStyle/>
+                    <a:p>
+                      <a:r>
+                        <a:rPr lang="en-US" sz="1000" dirty="0">
+                          <a:solidFill>
+                            <a:schemeClr val="bg1"/>
+                          </a:solidFill>
+                        </a:rPr>
+                        <a:t>Comment</a:t>
+                      </a:r>
+                    </a:p>
+                  </a:txBody>
+                  <a:tcPr>
+                    <a:solidFill>
+                      <a:schemeClr val="tx1"/>
+                    </a:solidFill>
+                  </a:tcPr>
+                </a:tc>
+                <a:extLst>
+                  <a:ext uri="{0D108BD9-81ED-4DB2-BD59-A6C34878D82A}">
+                    <a16:rowId xmlns:a16="http://schemas.microsoft.com/office/drawing/2014/main" val="1785363920"/>
+                  </a:ext>
+                </a:extLst>
+              </a:tr>
+              <a:tr h="296456">
+                <a:tc>
+                  <a:txBody>
+                    <a:bodyPr/>
+                    <a:lstStyle/>
+                    <a:p>
+                      <a:r>
+                        <a:rPr lang="en-US" sz="1000" dirty="0">
+                          <a:solidFill>
+                            <a:schemeClr val="bg1"/>
+                          </a:solidFill>
+                        </a:rPr>
+                        <a:t>S05</a:t>
+                      </a:r>
+                    </a:p>
+                  </a:txBody>
+                  <a:tcPr>
+                    <a:solidFill>
+                      <a:schemeClr val="tx1"/>
+                    </a:solidFill>
+                  </a:tcPr>
+                </a:tc>
+                <a:tc>
+                  <a:txBody>
+                    <a:bodyPr/>
+                    <a:lstStyle/>
+                    <a:p>
+                      <a:r>
+                        <a:rPr lang="en-US" sz="1000" dirty="0">
+                          <a:solidFill>
+                            <a:schemeClr val="bg1"/>
+                          </a:solidFill>
+                        </a:rPr>
+                        <a:t>29464</a:t>
+                      </a:r>
+                    </a:p>
+                  </a:txBody>
+                  <a:tcPr>
+                    <a:solidFill>
+                      <a:schemeClr val="tx1"/>
+                    </a:solidFill>
+                  </a:tcPr>
+                </a:tc>
+                <a:tc>
+                  <a:txBody>
+                    <a:bodyPr/>
+                    <a:lstStyle/>
+                    <a:p>
+                      <a:r>
+                        <a:rPr lang="en-US" sz="1000" dirty="0">
+                          <a:solidFill>
+                            <a:schemeClr val="bg1"/>
+                          </a:solidFill>
+                        </a:rPr>
+                        <a:t>1323</a:t>
+                      </a:r>
+                    </a:p>
+                  </a:txBody>
+                  <a:tcPr>
+                    <a:solidFill>
+                      <a:schemeClr val="tx1"/>
+                    </a:solidFill>
+                  </a:tcPr>
+                </a:tc>
+                <a:tc>
+                  <a:txBody>
+                    <a:bodyPr/>
+                    <a:lstStyle/>
+                    <a:p>
+                      <a:r>
+                        <a:rPr lang="en-US" sz="1000" dirty="0">
+                          <a:solidFill>
+                            <a:schemeClr val="bg1"/>
+                          </a:solidFill>
+                        </a:rPr>
+                        <a:t>large body, moderate cold</a:t>
+                      </a:r>
+                    </a:p>
+                  </a:txBody>
+                  <a:tcPr>
+                    <a:solidFill>
+                      <a:schemeClr val="tx1"/>
+                    </a:solidFill>
+                  </a:tcPr>
+                </a:tc>
+                <a:extLst>
+                  <a:ext uri="{0D108BD9-81ED-4DB2-BD59-A6C34878D82A}">
+                    <a16:rowId xmlns:a16="http://schemas.microsoft.com/office/drawing/2014/main" val="3371430040"/>
+                  </a:ext>
+                </a:extLst>
+              </a:tr>
+              <a:tr h="296456">
+                <a:tc>
+                  <a:txBody>
+                    <a:bodyPr/>
+                    <a:lstStyle/>
+                    <a:p>
+                      <a:pPr marL="0" marR="0" lvl="0" indent="0" algn="l" defTabSz="914400" rtl="0" eaLnBrk="1" fontAlgn="auto" latinLnBrk="0" hangingPunct="1">
+                        <a:lnSpc>
+                          <a:spcPct val="100000"/>
+                        </a:lnSpc>
+                        <a:spcBef>
+                          <a:spcPts val="0"/>
+                        </a:spcBef>
+                        <a:spcAft>
+                          <a:spcPts val="0"/>
+                        </a:spcAft>
+                        <a:buClrTx/>
+                        <a:buSzTx/>
+                        <a:buFontTx/>
+                        <a:buNone/>
+                        <a:tabLst/>
+                        <a:defRPr/>
+                      </a:pPr>
+                      <a:r>
+                        <a:rPr lang="en-US" sz="1000" dirty="0">
+                          <a:solidFill>
+                            <a:schemeClr val="bg1"/>
+                          </a:solidFill>
+                        </a:rPr>
+                        <a:t>S06</a:t>
+                      </a:r>
+                    </a:p>
+                  </a:txBody>
+                  <a:tcPr>
+                    <a:solidFill>
+                      <a:schemeClr val="tx1"/>
+                    </a:solidFill>
+                  </a:tcPr>
+                </a:tc>
+                <a:tc>
+                  <a:txBody>
+                    <a:bodyPr/>
+                    <a:lstStyle/>
+                    <a:p>
+                      <a:r>
+                        <a:rPr lang="en-US" sz="1000" dirty="0">
+                          <a:solidFill>
+                            <a:schemeClr val="bg1"/>
+                          </a:solidFill>
+                        </a:rPr>
+                        <a:t>15443</a:t>
+                      </a:r>
+                    </a:p>
+                  </a:txBody>
+                  <a:tcPr>
+                    <a:solidFill>
+                      <a:schemeClr val="tx1"/>
+                    </a:solidFill>
+                  </a:tcPr>
+                </a:tc>
+                <a:tc>
+                  <a:txBody>
+                    <a:bodyPr/>
+                    <a:lstStyle/>
+                    <a:p>
+                      <a:r>
+                        <a:rPr lang="en-US" sz="1000" dirty="0">
+                          <a:solidFill>
+                            <a:schemeClr val="bg1"/>
+                          </a:solidFill>
+                        </a:rPr>
+                        <a:t>1402</a:t>
+                      </a:r>
+                    </a:p>
+                  </a:txBody>
+                  <a:tcPr>
+                    <a:solidFill>
+                      <a:schemeClr val="tx1"/>
+                    </a:solidFill>
+                  </a:tcPr>
+                </a:tc>
+                <a:tc>
+                  <a:txBody>
+                    <a:bodyPr/>
+                    <a:lstStyle/>
+                    <a:p>
+                      <a:r>
+                        <a:rPr lang="en-US" sz="1000" dirty="0">
+                          <a:solidFill>
+                            <a:schemeClr val="bg1"/>
+                          </a:solidFill>
+                        </a:rPr>
+                        <a:t>one extreme cold outlier</a:t>
+                      </a:r>
+                    </a:p>
+                  </a:txBody>
+                  <a:tcPr>
+                    <a:solidFill>
+                      <a:schemeClr val="tx1"/>
+                    </a:solidFill>
+                  </a:tcPr>
+                </a:tc>
+                <a:extLst>
+                  <a:ext uri="{0D108BD9-81ED-4DB2-BD59-A6C34878D82A}">
+                    <a16:rowId xmlns:a16="http://schemas.microsoft.com/office/drawing/2014/main" val="3455074641"/>
+                  </a:ext>
+                </a:extLst>
+              </a:tr>
+              <a:tr h="296456">
+                <a:tc>
+                  <a:txBody>
+                    <a:bodyPr/>
+                    <a:lstStyle/>
+                    <a:p>
+                      <a:pPr marL="0" marR="0" lvl="0" indent="0" algn="l" defTabSz="914400" rtl="0" eaLnBrk="1" fontAlgn="auto" latinLnBrk="0" hangingPunct="1">
+                        <a:lnSpc>
+                          <a:spcPct val="100000"/>
+                        </a:lnSpc>
+                        <a:spcBef>
+                          <a:spcPts val="0"/>
+                        </a:spcBef>
+                        <a:spcAft>
+                          <a:spcPts val="0"/>
+                        </a:spcAft>
+                        <a:buClrTx/>
+                        <a:buSzTx/>
+                        <a:buFontTx/>
+                        <a:buNone/>
+                        <a:tabLst/>
+                        <a:defRPr/>
+                      </a:pPr>
+                      <a:r>
+                        <a:rPr lang="en-US" sz="1000" dirty="0">
+                          <a:solidFill>
+                            <a:schemeClr val="bg1"/>
+                          </a:solidFill>
+                        </a:rPr>
+                        <a:t>S07</a:t>
+                      </a:r>
+                    </a:p>
+                  </a:txBody>
+                  <a:tcPr>
+                    <a:solidFill>
+                      <a:schemeClr val="tx1"/>
+                    </a:solidFill>
+                  </a:tcPr>
+                </a:tc>
+                <a:tc>
+                  <a:txBody>
+                    <a:bodyPr/>
+                    <a:lstStyle/>
+                    <a:p>
+                      <a:r>
+                        <a:rPr lang="en-US" sz="1000" dirty="0">
+                          <a:solidFill>
+                            <a:schemeClr val="bg1"/>
+                          </a:solidFill>
+                        </a:rPr>
+                        <a:t>16550</a:t>
+                      </a:r>
+                    </a:p>
+                  </a:txBody>
+                  <a:tcPr>
+                    <a:solidFill>
+                      <a:schemeClr val="tx1"/>
+                    </a:solidFill>
+                  </a:tcPr>
+                </a:tc>
+                <a:tc>
+                  <a:txBody>
+                    <a:bodyPr/>
+                    <a:lstStyle/>
+                    <a:p>
+                      <a:r>
+                        <a:rPr lang="en-US" sz="1000" dirty="0">
+                          <a:solidFill>
+                            <a:schemeClr val="bg1"/>
+                          </a:solidFill>
+                        </a:rPr>
+                        <a:t>1561</a:t>
+                      </a:r>
+                    </a:p>
+                  </a:txBody>
+                  <a:tcPr>
+                    <a:solidFill>
+                      <a:schemeClr val="tx1"/>
+                    </a:solidFill>
+                  </a:tcPr>
+                </a:tc>
+                <a:tc>
+                  <a:txBody>
+                    <a:bodyPr/>
+                    <a:lstStyle/>
+                    <a:p>
+                      <a:r>
+                        <a:rPr lang="en-US" sz="1000" dirty="0">
+                          <a:solidFill>
+                            <a:schemeClr val="bg1"/>
+                          </a:solidFill>
+                        </a:rPr>
+                        <a:t>large variation</a:t>
+                      </a:r>
+                    </a:p>
+                  </a:txBody>
+                  <a:tcPr>
+                    <a:solidFill>
+                      <a:schemeClr val="tx1"/>
+                    </a:solidFill>
+                  </a:tcPr>
+                </a:tc>
+                <a:extLst>
+                  <a:ext uri="{0D108BD9-81ED-4DB2-BD59-A6C34878D82A}">
+                    <a16:rowId xmlns:a16="http://schemas.microsoft.com/office/drawing/2014/main" val="2500738505"/>
+                  </a:ext>
+                </a:extLst>
+              </a:tr>
+              <a:tr h="296456">
+                <a:tc>
+                  <a:txBody>
+                    <a:bodyPr/>
+                    <a:lstStyle/>
+                    <a:p>
+                      <a:pPr marL="0" marR="0" lvl="0" indent="0" algn="l" defTabSz="914400" rtl="0" eaLnBrk="1" fontAlgn="auto" latinLnBrk="0" hangingPunct="1">
+                        <a:lnSpc>
+                          <a:spcPct val="100000"/>
+                        </a:lnSpc>
+                        <a:spcBef>
+                          <a:spcPts val="0"/>
+                        </a:spcBef>
+                        <a:spcAft>
+                          <a:spcPts val="0"/>
+                        </a:spcAft>
+                        <a:buClrTx/>
+                        <a:buSzTx/>
+                        <a:buFontTx/>
+                        <a:buNone/>
+                        <a:tabLst/>
+                        <a:defRPr/>
+                      </a:pPr>
+                      <a:r>
+                        <a:rPr lang="en-US" sz="1000" dirty="0">
+                          <a:solidFill>
+                            <a:schemeClr val="bg1"/>
+                          </a:solidFill>
+                        </a:rPr>
+                        <a:t>S08</a:t>
+                      </a:r>
+                    </a:p>
+                  </a:txBody>
+                  <a:tcPr>
+                    <a:solidFill>
+                      <a:schemeClr val="tx1"/>
+                    </a:solidFill>
+                  </a:tcPr>
+                </a:tc>
+                <a:tc>
+                  <a:txBody>
+                    <a:bodyPr/>
+                    <a:lstStyle/>
+                    <a:p>
+                      <a:r>
+                        <a:rPr lang="en-US" sz="1000" dirty="0">
+                          <a:solidFill>
+                            <a:schemeClr val="bg1"/>
+                          </a:solidFill>
+                        </a:rPr>
+                        <a:t>16078</a:t>
+                      </a:r>
+                    </a:p>
+                  </a:txBody>
+                  <a:tcPr>
+                    <a:solidFill>
+                      <a:schemeClr val="tx1"/>
+                    </a:solidFill>
+                  </a:tcPr>
+                </a:tc>
+                <a:tc>
+                  <a:txBody>
+                    <a:bodyPr/>
+                    <a:lstStyle/>
+                    <a:p>
+                      <a:r>
+                        <a:rPr lang="en-US" sz="1000" dirty="0">
+                          <a:solidFill>
+                            <a:schemeClr val="bg1"/>
+                          </a:solidFill>
+                        </a:rPr>
+                        <a:t>417</a:t>
+                      </a:r>
+                    </a:p>
+                  </a:txBody>
+                  <a:tcPr>
+                    <a:solidFill>
+                      <a:schemeClr val="tx1"/>
+                    </a:solidFill>
+                  </a:tcPr>
+                </a:tc>
+                <a:tc>
+                  <a:txBody>
+                    <a:bodyPr/>
+                    <a:lstStyle/>
+                    <a:p>
+                      <a:r>
+                        <a:rPr lang="en-US" sz="1000" dirty="0">
+                          <a:solidFill>
+                            <a:schemeClr val="bg1"/>
+                          </a:solidFill>
+                        </a:rPr>
+                        <a:t>small cold, one empty mask</a:t>
+                      </a:r>
+                    </a:p>
+                  </a:txBody>
+                  <a:tcPr>
+                    <a:solidFill>
+                      <a:schemeClr val="tx1"/>
+                    </a:solidFill>
+                  </a:tcPr>
+                </a:tc>
+                <a:extLst>
+                  <a:ext uri="{0D108BD9-81ED-4DB2-BD59-A6C34878D82A}">
+                    <a16:rowId xmlns:a16="http://schemas.microsoft.com/office/drawing/2014/main" val="1167554781"/>
+                  </a:ext>
+                </a:extLst>
+              </a:tr>
+              <a:tr h="296456">
+                <a:tc>
+                  <a:txBody>
+                    <a:bodyPr/>
+                    <a:lstStyle/>
+                    <a:p>
+                      <a:pPr marL="0" marR="0" lvl="0" indent="0" algn="l" defTabSz="914400" rtl="0" eaLnBrk="1" fontAlgn="auto" latinLnBrk="0" hangingPunct="1">
+                        <a:lnSpc>
+                          <a:spcPct val="100000"/>
+                        </a:lnSpc>
+                        <a:spcBef>
+                          <a:spcPts val="0"/>
+                        </a:spcBef>
+                        <a:spcAft>
+                          <a:spcPts val="0"/>
+                        </a:spcAft>
+                        <a:buClrTx/>
+                        <a:buSzTx/>
+                        <a:buFontTx/>
+                        <a:buNone/>
+                        <a:tabLst/>
+                        <a:defRPr/>
+                      </a:pPr>
+                      <a:r>
+                        <a:rPr lang="en-US" sz="1000" dirty="0">
+                          <a:solidFill>
+                            <a:schemeClr val="bg1"/>
+                          </a:solidFill>
+                        </a:rPr>
+                        <a:t>S09</a:t>
+                      </a:r>
+                    </a:p>
+                  </a:txBody>
+                  <a:tcPr>
+                    <a:solidFill>
+                      <a:schemeClr val="tx1"/>
+                    </a:solidFill>
+                  </a:tcPr>
+                </a:tc>
+                <a:tc>
+                  <a:txBody>
+                    <a:bodyPr/>
+                    <a:lstStyle/>
+                    <a:p>
+                      <a:r>
+                        <a:rPr lang="en-US" sz="1000" dirty="0">
+                          <a:solidFill>
+                            <a:schemeClr val="bg1"/>
+                          </a:solidFill>
+                        </a:rPr>
+                        <a:t>13150</a:t>
+                      </a:r>
+                    </a:p>
+                  </a:txBody>
+                  <a:tcPr>
+                    <a:solidFill>
+                      <a:schemeClr val="tx1"/>
+                    </a:solidFill>
+                  </a:tcPr>
+                </a:tc>
+                <a:tc>
+                  <a:txBody>
+                    <a:bodyPr/>
+                    <a:lstStyle/>
+                    <a:p>
+                      <a:r>
+                        <a:rPr lang="en-US" sz="1000" dirty="0">
+                          <a:solidFill>
+                            <a:schemeClr val="bg1"/>
+                          </a:solidFill>
+                        </a:rPr>
+                        <a:t>334</a:t>
+                      </a:r>
+                    </a:p>
+                  </a:txBody>
+                  <a:tcPr>
+                    <a:solidFill>
+                      <a:schemeClr val="tx1"/>
+                    </a:solidFill>
+                  </a:tcPr>
+                </a:tc>
+                <a:tc>
+                  <a:txBody>
+                    <a:bodyPr/>
+                    <a:lstStyle/>
+                    <a:p>
+                      <a:r>
+                        <a:rPr lang="en-US" sz="1000" dirty="0">
+                          <a:solidFill>
+                            <a:schemeClr val="bg1"/>
+                          </a:solidFill>
+                        </a:rPr>
+                        <a:t>small cold</a:t>
+                      </a:r>
+                    </a:p>
+                  </a:txBody>
+                  <a:tcPr>
+                    <a:solidFill>
+                      <a:schemeClr val="tx1"/>
+                    </a:solidFill>
+                  </a:tcPr>
+                </a:tc>
+                <a:extLst>
+                  <a:ext uri="{0D108BD9-81ED-4DB2-BD59-A6C34878D82A}">
+                    <a16:rowId xmlns:a16="http://schemas.microsoft.com/office/drawing/2014/main" val="3378628536"/>
+                  </a:ext>
+                </a:extLst>
+              </a:tr>
+              <a:tr h="296456">
+                <a:tc>
+                  <a:txBody>
+                    <a:bodyPr/>
+                    <a:lstStyle/>
+                    <a:p>
+                      <a:pPr marL="0" marR="0" lvl="0" indent="0" algn="l" defTabSz="914400" rtl="0" eaLnBrk="1" fontAlgn="auto" latinLnBrk="0" hangingPunct="1">
+                        <a:lnSpc>
+                          <a:spcPct val="100000"/>
+                        </a:lnSpc>
+                        <a:spcBef>
+                          <a:spcPts val="0"/>
+                        </a:spcBef>
+                        <a:spcAft>
+                          <a:spcPts val="0"/>
+                        </a:spcAft>
+                        <a:buClrTx/>
+                        <a:buSzTx/>
+                        <a:buFontTx/>
+                        <a:buNone/>
+                        <a:tabLst/>
+                        <a:defRPr/>
+                      </a:pPr>
+                      <a:r>
+                        <a:rPr lang="en-US" sz="1000" dirty="0">
+                          <a:solidFill>
+                            <a:schemeClr val="bg1"/>
+                          </a:solidFill>
+                        </a:rPr>
+                        <a:t>S10</a:t>
+                      </a:r>
+                    </a:p>
+                  </a:txBody>
+                  <a:tcPr>
+                    <a:solidFill>
+                      <a:schemeClr val="tx1"/>
+                    </a:solidFill>
+                  </a:tcPr>
+                </a:tc>
+                <a:tc>
+                  <a:txBody>
+                    <a:bodyPr/>
+                    <a:lstStyle/>
+                    <a:p>
+                      <a:r>
+                        <a:rPr lang="en-US" sz="1000" dirty="0">
+                          <a:solidFill>
+                            <a:schemeClr val="bg1"/>
+                          </a:solidFill>
+                        </a:rPr>
+                        <a:t>9319</a:t>
+                      </a:r>
+                    </a:p>
+                  </a:txBody>
+                  <a:tcPr>
+                    <a:solidFill>
+                      <a:schemeClr val="tx1"/>
+                    </a:solidFill>
+                  </a:tcPr>
+                </a:tc>
+                <a:tc>
+                  <a:txBody>
+                    <a:bodyPr/>
+                    <a:lstStyle/>
+                    <a:p>
+                      <a:r>
+                        <a:rPr lang="en-US" sz="1000" dirty="0">
+                          <a:solidFill>
+                            <a:schemeClr val="bg1"/>
+                          </a:solidFill>
+                        </a:rPr>
+                        <a:t>260</a:t>
+                      </a:r>
+                    </a:p>
+                  </a:txBody>
+                  <a:tcPr>
+                    <a:solidFill>
+                      <a:schemeClr val="tx1"/>
+                    </a:solidFill>
+                  </a:tcPr>
+                </a:tc>
+                <a:tc>
+                  <a:txBody>
+                    <a:bodyPr/>
+                    <a:lstStyle/>
+                    <a:p>
+                      <a:r>
+                        <a:rPr lang="en-US" sz="1000" dirty="0">
+                          <a:solidFill>
+                            <a:schemeClr val="bg1"/>
+                          </a:solidFill>
+                        </a:rPr>
+                        <a:t>very small cold</a:t>
+                      </a:r>
+                    </a:p>
+                  </a:txBody>
+                  <a:tcPr>
+                    <a:solidFill>
+                      <a:schemeClr val="tx1"/>
+                    </a:solidFill>
+                  </a:tcPr>
+                </a:tc>
+                <a:extLst>
+                  <a:ext uri="{0D108BD9-81ED-4DB2-BD59-A6C34878D82A}">
+                    <a16:rowId xmlns:a16="http://schemas.microsoft.com/office/drawing/2014/main" val="2070076875"/>
+                  </a:ext>
+                </a:extLst>
+              </a:tr>
+              <a:tr h="296456">
+                <a:tc>
+                  <a:txBody>
+                    <a:bodyPr/>
+                    <a:lstStyle/>
+                    <a:p>
+                      <a:pPr marL="0" marR="0" lvl="0" indent="0" algn="l" defTabSz="914400" rtl="0" eaLnBrk="1" fontAlgn="auto" latinLnBrk="0" hangingPunct="1">
+                        <a:lnSpc>
+                          <a:spcPct val="100000"/>
+                        </a:lnSpc>
+                        <a:spcBef>
+                          <a:spcPts val="0"/>
+                        </a:spcBef>
+                        <a:spcAft>
+                          <a:spcPts val="0"/>
+                        </a:spcAft>
+                        <a:buClrTx/>
+                        <a:buSzTx/>
+                        <a:buFontTx/>
+                        <a:buNone/>
+                        <a:tabLst/>
+                        <a:defRPr/>
+                      </a:pPr>
+                      <a:r>
+                        <a:rPr lang="en-US" sz="1000" dirty="0">
+                          <a:solidFill>
+                            <a:schemeClr val="bg1"/>
+                          </a:solidFill>
+                        </a:rPr>
+                        <a:t>S11</a:t>
+                      </a:r>
+                    </a:p>
+                  </a:txBody>
+                  <a:tcPr>
+                    <a:solidFill>
+                      <a:schemeClr val="tx1"/>
+                    </a:solidFill>
+                  </a:tcPr>
+                </a:tc>
+                <a:tc>
+                  <a:txBody>
+                    <a:bodyPr/>
+                    <a:lstStyle/>
+                    <a:p>
+                      <a:r>
+                        <a:rPr lang="en-US" sz="1000" dirty="0">
+                          <a:solidFill>
+                            <a:schemeClr val="bg1"/>
+                          </a:solidFill>
+                        </a:rPr>
+                        <a:t>13192</a:t>
+                      </a:r>
+                    </a:p>
+                  </a:txBody>
+                  <a:tcPr>
+                    <a:solidFill>
+                      <a:schemeClr val="tx1"/>
+                    </a:solidFill>
+                  </a:tcPr>
+                </a:tc>
+                <a:tc>
+                  <a:txBody>
+                    <a:bodyPr/>
+                    <a:lstStyle/>
+                    <a:p>
+                      <a:r>
+                        <a:rPr lang="en-US" sz="1000" dirty="0">
+                          <a:solidFill>
+                            <a:schemeClr val="bg1"/>
+                          </a:solidFill>
+                        </a:rPr>
+                        <a:t>2032</a:t>
+                      </a:r>
+                    </a:p>
+                  </a:txBody>
+                  <a:tcPr>
+                    <a:solidFill>
+                      <a:schemeClr val="tx1"/>
+                    </a:solidFill>
+                  </a:tcPr>
+                </a:tc>
+                <a:tc>
+                  <a:txBody>
+                    <a:bodyPr/>
+                    <a:lstStyle/>
+                    <a:p>
+                      <a:r>
+                        <a:rPr lang="en-US" sz="1000" dirty="0">
+                          <a:solidFill>
+                            <a:schemeClr val="bg1"/>
+                          </a:solidFill>
+                        </a:rPr>
+                        <a:t>large cold</a:t>
+                      </a:r>
+                    </a:p>
+                  </a:txBody>
+                  <a:tcPr>
+                    <a:solidFill>
+                      <a:schemeClr val="tx1"/>
+                    </a:solidFill>
+                  </a:tcPr>
+                </a:tc>
+                <a:extLst>
+                  <a:ext uri="{0D108BD9-81ED-4DB2-BD59-A6C34878D82A}">
+                    <a16:rowId xmlns:a16="http://schemas.microsoft.com/office/drawing/2014/main" val="2430352868"/>
+                  </a:ext>
+                </a:extLst>
+              </a:tr>
+            </a:tbl>
+          </a:graphicData>
+        </a:graphic>
+      </p:graphicFrame>
+      <p:sp>
+        <p:nvSpPr>
+          <p:cNvPr id="35" name="TextBox 34">
+            <a:extLst>
+              <a:ext uri="{FF2B5EF4-FFF2-40B4-BE49-F238E27FC236}">
+                <a16:creationId xmlns:a16="http://schemas.microsoft.com/office/drawing/2014/main" id="{444AE30F-99BC-D638-E7E8-ED2C2D2E596F}"/>
+              </a:ext>
+            </a:extLst>
+          </p:cNvPr>
+          <p:cNvSpPr txBox="1"/>
+          <p:nvPr/>
+        </p:nvSpPr>
+        <p:spPr>
+          <a:xfrm>
+            <a:off x="441960" y="3578659"/>
+            <a:ext cx="6094476" cy="1169551"/>
+          </a:xfrm>
+          <a:prstGeom prst="rect">
+            <a:avLst/>
+          </a:prstGeom>
+          <a:noFill/>
+        </p:spPr>
+        <p:txBody>
+          <a:bodyPr wrap="square">
+            <a:spAutoFit/>
+          </a:bodyPr>
+          <a:lstStyle/>
+          <a:p>
+            <a:r>
+              <a:rPr lang="en-US" sz="1400" b="1" dirty="0">
+                <a:solidFill>
+                  <a:srgbClr val="FFC000"/>
+                </a:solidFill>
+              </a:rPr>
+              <a:t>Important actual data problems:</a:t>
+            </a:r>
+          </a:p>
+          <a:p>
+            <a:pPr marL="285750" indent="-285750">
+              <a:buFont typeface="Arial" panose="020B0604020202020204" pitchFamily="34" charset="0"/>
+              <a:buChar char="•"/>
+            </a:pPr>
+            <a:r>
+              <a:rPr lang="en-US" sz="1400" dirty="0">
+                <a:solidFill>
+                  <a:schemeClr val="bg1"/>
+                </a:solidFill>
+              </a:rPr>
+              <a:t>56 cases have image-mask shape mismatch</a:t>
+            </a:r>
+          </a:p>
+          <a:p>
+            <a:pPr marL="285750" indent="-285750">
+              <a:buFont typeface="Arial" panose="020B0604020202020204" pitchFamily="34" charset="0"/>
+              <a:buChar char="•"/>
+            </a:pPr>
+            <a:r>
+              <a:rPr lang="en-US" sz="1400" dirty="0">
+                <a:solidFill>
+                  <a:schemeClr val="bg1"/>
+                </a:solidFill>
+              </a:rPr>
+              <a:t>1 case has empty body and empty cold</a:t>
+            </a:r>
+          </a:p>
+          <a:p>
+            <a:pPr marL="285750" indent="-285750">
+              <a:buFont typeface="Arial" panose="020B0604020202020204" pitchFamily="34" charset="0"/>
+              <a:buChar char="•"/>
+            </a:pPr>
+            <a:r>
+              <a:rPr lang="en-US" sz="1400" dirty="0">
+                <a:solidFill>
+                  <a:schemeClr val="bg1"/>
+                </a:solidFill>
+              </a:rPr>
+              <a:t>1 case has extremely large cold fraction</a:t>
+            </a:r>
+          </a:p>
+          <a:p>
+            <a:pPr marL="285750" indent="-285750">
+              <a:buFont typeface="Arial" panose="020B0604020202020204" pitchFamily="34" charset="0"/>
+              <a:buChar char="•"/>
+            </a:pPr>
+            <a:r>
+              <a:rPr lang="en-US" sz="1400" dirty="0">
+                <a:solidFill>
+                  <a:schemeClr val="bg1"/>
+                </a:solidFill>
+              </a:rPr>
+              <a:t>very tiny cold cases exist</a:t>
+            </a:r>
+          </a:p>
+        </p:txBody>
+      </p:sp>
     </p:spTree>
   </p:cSld>
   <p:clrMapOvr>
